--- a/GuilhermeBackLucasFritzke/Template_Semnario_Grupo_Guilherme_Lucas_Atual.pptx
+++ b/GuilhermeBackLucasFritzke/Template_Semnario_Grupo_Guilherme_Lucas_Atual.pptx
@@ -5,7 +5,7 @@
     <p:sldMasterId id="2147483648" r:id="rId1"/>
   </p:sldMasterIdLst>
   <p:notesMasterIdLst>
-    <p:notesMasterId r:id="rId22"/>
+    <p:notesMasterId r:id="rId25"/>
   </p:notesMasterIdLst>
   <p:sldIdLst>
     <p:sldId id="256" r:id="rId2"/>
@@ -28,6 +28,9 @@
     <p:sldId id="273" r:id="rId19"/>
     <p:sldId id="274" r:id="rId20"/>
     <p:sldId id="275" r:id="rId21"/>
+    <p:sldId id="276" r:id="rId22"/>
+    <p:sldId id="277" r:id="rId23"/>
+    <p:sldId id="278" r:id="rId24"/>
   </p:sldIdLst>
   <p:sldSz cx="12192000" cy="6858000"/>
   <p:notesSz cx="6858000" cy="9144000"/>
@@ -2340,7 +2343,7 @@
               </a:lnSpc>
             </a:pPr>
             <a:r>
-              <a:rPr lang="pt-BR" sz="1800" b="1" u="none" strike="noStrike">
+              <a:rPr lang="pt-BR" sz="1800" b="1" u="none" strike="noStrike" dirty="0">
                 <a:solidFill>
                   <a:schemeClr val="dk2">
                     <a:lumMod val="90000"/>
@@ -2353,7 +2356,7 @@
               </a:rPr>
               <a:t>Título: </a:t>
             </a:r>
-            <a:endParaRPr lang="en-US" sz="1800" b="0" u="none" strike="noStrike">
+            <a:endParaRPr lang="en-US" sz="1800" b="0" u="none" strike="noStrike" dirty="0">
               <a:solidFill>
                 <a:srgbClr val="000000"/>
               </a:solidFill>
@@ -2368,7 +2371,7 @@
                 <a:spcPct val="100000"/>
               </a:lnSpc>
             </a:pPr>
-            <a:endParaRPr lang="en-US" sz="1800" b="0" u="none" strike="noStrike">
+            <a:endParaRPr lang="en-US" sz="1800" b="0" u="none" strike="noStrike" dirty="0">
               <a:solidFill>
                 <a:srgbClr val="000000"/>
               </a:solidFill>
@@ -14146,6 +14149,204 @@
         </p:txBody>
       </p:sp>
     </p:spTree>
+  </p:cSld>
+  <p:clrMapOvr>
+    <a:masterClrMapping/>
+  </p:clrMapOvr>
+</p:sld>
+</file>
+
+<file path=ppt/slides/slide21.xml><?xml version="1.0" encoding="utf-8"?>
+<p:sld xmlns:a="http://schemas.openxmlformats.org/drawingml/2006/main" xmlns:r="http://schemas.openxmlformats.org/officeDocument/2006/relationships" xmlns:p="http://schemas.openxmlformats.org/presentationml/2006/main">
+  <p:cSld>
+    <p:spTree>
+      <p:nvGrpSpPr>
+        <p:cNvPr id="1" name="">
+          <a:extLst>
+            <a:ext uri="{FF2B5EF4-FFF2-40B4-BE49-F238E27FC236}">
+              <a16:creationId xmlns:a16="http://schemas.microsoft.com/office/drawing/2014/main" id="{3B45AF13-7B69-D3BF-3474-6D41ED825373}"/>
+            </a:ext>
+          </a:extLst>
+        </p:cNvPr>
+        <p:cNvGrpSpPr/>
+        <p:nvPr/>
+      </p:nvGrpSpPr>
+      <p:grpSpPr>
+        <a:xfrm>
+          <a:off x="0" y="0"/>
+          <a:ext cx="0" cy="0"/>
+          <a:chOff x="0" y="0"/>
+          <a:chExt cx="0" cy="0"/>
+        </a:xfrm>
+      </p:grpSpPr>
+      <p:pic>
+        <p:nvPicPr>
+          <p:cNvPr id="7" name="Imagem 6">
+            <a:extLst>
+              <a:ext uri="{FF2B5EF4-FFF2-40B4-BE49-F238E27FC236}">
+                <a16:creationId xmlns:a16="http://schemas.microsoft.com/office/drawing/2014/main" id="{C6004C23-79DA-81A9-1BB3-D8B3E976C931}"/>
+              </a:ext>
+            </a:extLst>
+          </p:cNvPr>
+          <p:cNvPicPr>
+            <a:picLocks noChangeAspect="1"/>
+          </p:cNvPicPr>
+          <p:nvPr/>
+        </p:nvPicPr>
+        <p:blipFill>
+          <a:blip r:embed="rId2"/>
+          <a:stretch>
+            <a:fillRect/>
+          </a:stretch>
+        </p:blipFill>
+        <p:spPr>
+          <a:xfrm>
+            <a:off x="1662493" y="677417"/>
+            <a:ext cx="8432483" cy="5995415"/>
+          </a:xfrm>
+          <a:prstGeom prst="rect">
+            <a:avLst/>
+          </a:prstGeom>
+        </p:spPr>
+      </p:pic>
+    </p:spTree>
+    <p:extLst>
+      <p:ext uri="{BB962C8B-B14F-4D97-AF65-F5344CB8AC3E}">
+        <p14:creationId xmlns:p14="http://schemas.microsoft.com/office/powerpoint/2010/main" val="4149473793"/>
+      </p:ext>
+    </p:extLst>
+  </p:cSld>
+  <p:clrMapOvr>
+    <a:masterClrMapping/>
+  </p:clrMapOvr>
+</p:sld>
+</file>
+
+<file path=ppt/slides/slide22.xml><?xml version="1.0" encoding="utf-8"?>
+<p:sld xmlns:a="http://schemas.openxmlformats.org/drawingml/2006/main" xmlns:r="http://schemas.openxmlformats.org/officeDocument/2006/relationships" xmlns:p="http://schemas.openxmlformats.org/presentationml/2006/main">
+  <p:cSld>
+    <p:spTree>
+      <p:nvGrpSpPr>
+        <p:cNvPr id="1" name="">
+          <a:extLst>
+            <a:ext uri="{FF2B5EF4-FFF2-40B4-BE49-F238E27FC236}">
+              <a16:creationId xmlns:a16="http://schemas.microsoft.com/office/drawing/2014/main" id="{96DF12E3-8CDD-1DFC-1986-1C8253375345}"/>
+            </a:ext>
+          </a:extLst>
+        </p:cNvPr>
+        <p:cNvGrpSpPr/>
+        <p:nvPr/>
+      </p:nvGrpSpPr>
+      <p:grpSpPr>
+        <a:xfrm>
+          <a:off x="0" y="0"/>
+          <a:ext cx="0" cy="0"/>
+          <a:chOff x="0" y="0"/>
+          <a:chExt cx="0" cy="0"/>
+        </a:xfrm>
+      </p:grpSpPr>
+      <p:pic>
+        <p:nvPicPr>
+          <p:cNvPr id="3" name="Imagem 2">
+            <a:extLst>
+              <a:ext uri="{FF2B5EF4-FFF2-40B4-BE49-F238E27FC236}">
+                <a16:creationId xmlns:a16="http://schemas.microsoft.com/office/drawing/2014/main" id="{8CFC64E7-C5A2-0C05-20F0-D983A17A61B6}"/>
+              </a:ext>
+            </a:extLst>
+          </p:cNvPr>
+          <p:cNvPicPr>
+            <a:picLocks noChangeAspect="1"/>
+          </p:cNvPicPr>
+          <p:nvPr/>
+        </p:nvPicPr>
+        <p:blipFill>
+          <a:blip r:embed="rId2"/>
+          <a:stretch>
+            <a:fillRect/>
+          </a:stretch>
+        </p:blipFill>
+        <p:spPr>
+          <a:xfrm>
+            <a:off x="1724120" y="458007"/>
+            <a:ext cx="8590312" cy="6125973"/>
+          </a:xfrm>
+          <a:prstGeom prst="rect">
+            <a:avLst/>
+          </a:prstGeom>
+        </p:spPr>
+      </p:pic>
+    </p:spTree>
+    <p:extLst>
+      <p:ext uri="{BB962C8B-B14F-4D97-AF65-F5344CB8AC3E}">
+        <p14:creationId xmlns:p14="http://schemas.microsoft.com/office/powerpoint/2010/main" val="1256122888"/>
+      </p:ext>
+    </p:extLst>
+  </p:cSld>
+  <p:clrMapOvr>
+    <a:masterClrMapping/>
+  </p:clrMapOvr>
+</p:sld>
+</file>
+
+<file path=ppt/slides/slide23.xml><?xml version="1.0" encoding="utf-8"?>
+<p:sld xmlns:a="http://schemas.openxmlformats.org/drawingml/2006/main" xmlns:r="http://schemas.openxmlformats.org/officeDocument/2006/relationships" xmlns:p="http://schemas.openxmlformats.org/presentationml/2006/main">
+  <p:cSld>
+    <p:spTree>
+      <p:nvGrpSpPr>
+        <p:cNvPr id="1" name="">
+          <a:extLst>
+            <a:ext uri="{FF2B5EF4-FFF2-40B4-BE49-F238E27FC236}">
+              <a16:creationId xmlns:a16="http://schemas.microsoft.com/office/drawing/2014/main" id="{8BFD45E8-F9D3-953C-A8D8-61CA97BA074E}"/>
+            </a:ext>
+          </a:extLst>
+        </p:cNvPr>
+        <p:cNvGrpSpPr/>
+        <p:nvPr/>
+      </p:nvGrpSpPr>
+      <p:grpSpPr>
+        <a:xfrm>
+          <a:off x="0" y="0"/>
+          <a:ext cx="0" cy="0"/>
+          <a:chOff x="0" y="0"/>
+          <a:chExt cx="0" cy="0"/>
+        </a:xfrm>
+      </p:grpSpPr>
+      <p:pic>
+        <p:nvPicPr>
+          <p:cNvPr id="5" name="Imagem 4">
+            <a:extLst>
+              <a:ext uri="{FF2B5EF4-FFF2-40B4-BE49-F238E27FC236}">
+                <a16:creationId xmlns:a16="http://schemas.microsoft.com/office/drawing/2014/main" id="{50424F8C-DD36-707A-79B2-586926F762C5}"/>
+              </a:ext>
+            </a:extLst>
+          </p:cNvPr>
+          <p:cNvPicPr>
+            <a:picLocks noChangeAspect="1"/>
+          </p:cNvPicPr>
+          <p:nvPr/>
+        </p:nvPicPr>
+        <p:blipFill>
+          <a:blip r:embed="rId2"/>
+          <a:stretch>
+            <a:fillRect/>
+          </a:stretch>
+        </p:blipFill>
+        <p:spPr>
+          <a:xfrm>
+            <a:off x="1552765" y="505335"/>
+            <a:ext cx="8405051" cy="6169786"/>
+          </a:xfrm>
+          <a:prstGeom prst="rect">
+            <a:avLst/>
+          </a:prstGeom>
+        </p:spPr>
+      </p:pic>
+    </p:spTree>
+    <p:extLst>
+      <p:ext uri="{BB962C8B-B14F-4D97-AF65-F5344CB8AC3E}">
+        <p14:creationId xmlns:p14="http://schemas.microsoft.com/office/powerpoint/2010/main" val="2880788192"/>
+      </p:ext>
+    </p:extLst>
   </p:cSld>
   <p:clrMapOvr>
     <a:masterClrMapping/>
